--- a/listings/assets/pptx/05-mail-ai.pptx
+++ b/listings/assets/pptx/05-mail-ai.pptx
@@ -891,7 +891,7 @@
         </p:blipFill>
         <p:spPr>
           <a:xfrm>
-            <a:off x="3127248" y="548640"/>
+            <a:off x="3127248" y="603504"/>
             <a:ext cx="2788920" cy="2788920"/>
           </a:xfrm>
           <a:prstGeom prst="rect">
@@ -907,7 +907,7 @@
         </p:nvSpPr>
         <p:spPr>
           <a:xfrm>
-            <a:off x="384048" y="566928"/>
+            <a:off x="384048" y="1078992"/>
             <a:ext cx="2743200" cy="292608"/>
           </a:xfrm>
           <a:prstGeom prst="rect">
@@ -946,8 +946,8 @@
         </p:nvSpPr>
         <p:spPr>
           <a:xfrm>
-            <a:off x="365760" y="932688"/>
-            <a:ext cx="2926080" cy="1371600"/>
+            <a:off x="365760" y="1444752"/>
+            <a:ext cx="2926080" cy="1188720"/>
           </a:xfrm>
           <a:prstGeom prst="rect">
             <a:avLst/>
@@ -1002,79 +1002,13 @@
       </p:sp>
       <p:sp>
         <p:nvSpPr>
-          <p:cNvPr id="5" name="Shape 2"/>
-          <p:cNvSpPr/>
-          <p:nvPr/>
-        </p:nvSpPr>
-        <p:spPr>
-          <a:xfrm>
-            <a:off x="384048" y="2505456"/>
-            <a:ext cx="1755648" cy="548640"/>
-          </a:xfrm>
-          <a:prstGeom prst="roundRect">
-            <a:avLst>
-              <a:gd name="adj" fmla="val 50000"/>
-            </a:avLst>
-          </a:prstGeom>
-          <a:solidFill>
-            <a:srgbClr val="DB553F"/>
-          </a:solidFill>
-          <a:ln w="12700">
-            <a:solidFill>
-              <a:srgbClr val="DB553F"/>
-            </a:solidFill>
-            <a:prstDash val="solid"/>
-          </a:ln>
-        </p:spPr>
-      </p:sp>
-      <p:sp>
-        <p:nvSpPr>
-          <p:cNvPr id="6" name="Text 3"/>
+          <p:cNvPr id="5" name="Text 2"/>
           <p:cNvSpPr txBox="1"/>
           <p:nvPr/>
         </p:nvSpPr>
         <p:spPr>
           <a:xfrm>
-            <a:off x="384048" y="2505456"/>
-            <a:ext cx="1755648" cy="548640"/>
-          </a:xfrm>
-          <a:prstGeom prst="rect">
-            <a:avLst/>
-          </a:prstGeom>
-          <a:noFill/>
-          <a:ln/>
-        </p:spPr>
-        <p:txBody>
-          <a:bodyPr wrap="square" lIns="0" tIns="0" rIns="0" bIns="0" rtlCol="0" anchor="ctr"/>
-          <a:lstStyle/>
-          <a:p>
-            <a:pPr algn="ctr" indent="0" marL="0">
-              <a:buNone/>
-            </a:pPr>
-            <a:r>
-              <a:rPr lang="en-US" sz="2000" b="1" dirty="0">
-                <a:solidFill>
-                  <a:srgbClr val="FFFFFF"/>
-                </a:solidFill>
-                <a:latin typeface="メイリオ" pitchFamily="34" charset="0"/>
-                <a:ea typeface="メイリオ" pitchFamily="34" charset="-122"/>
-                <a:cs typeface="メイリオ" pitchFamily="34" charset="-120"/>
-              </a:rPr>
-              <a:t>20,000円</a:t>
-            </a:r>
-            <a:endParaRPr lang="en-US" sz="2000" dirty="0"/>
-          </a:p>
-        </p:txBody>
-      </p:sp>
-      <p:sp>
-        <p:nvSpPr>
-          <p:cNvPr id="7" name="Text 4"/>
-          <p:cNvSpPr txBox="1"/>
-          <p:nvPr/>
-        </p:nvSpPr>
-        <p:spPr>
-          <a:xfrm>
-            <a:off x="384048" y="3310128"/>
+            <a:off x="384048" y="2761488"/>
             <a:ext cx="2926080" cy="274320"/>
           </a:xfrm>
           <a:prstGeom prst="rect">
